--- a/index/designs/y9-l8/l8-review-test-prep/l8-review-test-prep.pptx
+++ b/index/designs/y9-l8/l8-review-test-prep/l8-review-test-prep.pptx
@@ -2631,15 +2631,6 @@
               </a:rPr>
               <a:t>综合</a:t>
             </a:r>
-            <a:pPr algn="ctr" indent="0" marL="0">
-              <a:lnSpc>
-                <a:spcPts val="8400"/>
-              </a:lnSpc>
-              <a:spcAft>
-                <a:spcPts val="1000"/>
-              </a:spcAft>
-              <a:buNone/>
-            </a:pPr>
             <a:r>
               <a:rPr lang="en-US" sz="8000" b="1" dirty="0">
                 <a:solidFill>
@@ -2651,15 +2642,6 @@
               </a:rPr>
               <a:t>·</a:t>
             </a:r>
-            <a:pPr algn="ctr" indent="0" marL="0">
-              <a:lnSpc>
-                <a:spcPts val="8400"/>
-              </a:lnSpc>
-              <a:spcAft>
-                <a:spcPts val="1000"/>
-              </a:spcAft>
-              <a:buNone/>
-            </a:pPr>
             <a:r>
               <a:rPr lang="en-US" sz="8000" dirty="0">
                 <a:solidFill>
@@ -3543,9 +3525,6 @@
               </a:rPr>
               <a:t>一</a:t>
             </a:r>
-            <a:pPr algn="l" indent="0" marL="0">
-              <a:buNone/>
-            </a:pPr>
             <a:r>
               <a:rPr lang="en-US" sz="1300" dirty="0">
                 <a:solidFill>
@@ -3703,9 +3682,6 @@
               </a:rPr>
               <a:t>一</a:t>
             </a:r>
-            <a:pPr algn="l" indent="0" marL="0">
-              <a:buNone/>
-            </a:pPr>
             <a:r>
               <a:rPr lang="en-US" sz="1300" dirty="0">
                 <a:solidFill>
@@ -3863,9 +3839,6 @@
               </a:rPr>
               <a:t>一</a:t>
             </a:r>
-            <a:pPr algn="l" indent="0" marL="0">
-              <a:buNone/>
-            </a:pPr>
             <a:r>
               <a:rPr lang="en-US" sz="1300" dirty="0">
                 <a:solidFill>
@@ -4023,9 +3996,6 @@
               </a:rPr>
               <a:t>一</a:t>
             </a:r>
-            <a:pPr algn="l" indent="0" marL="0">
-              <a:buNone/>
-            </a:pPr>
             <a:r>
               <a:rPr lang="en-US" sz="1300" dirty="0">
                 <a:solidFill>
@@ -4183,9 +4153,6 @@
               </a:rPr>
               <a:t>一</a:t>
             </a:r>
-            <a:pPr algn="l" indent="0" marL="0">
-              <a:buNone/>
-            </a:pPr>
             <a:r>
               <a:rPr lang="en-US" sz="1300" dirty="0">
                 <a:solidFill>
@@ -4343,9 +4310,6 @@
               </a:rPr>
               <a:t>一</a:t>
             </a:r>
-            <a:pPr algn="l" indent="0" marL="0">
-              <a:buNone/>
-            </a:pPr>
             <a:r>
               <a:rPr lang="en-US" sz="1300" dirty="0">
                 <a:solidFill>
@@ -4503,9 +4467,6 @@
               </a:rPr>
               <a:t>一</a:t>
             </a:r>
-            <a:pPr algn="l" indent="0" marL="0">
-              <a:buNone/>
-            </a:pPr>
             <a:r>
               <a:rPr lang="en-US" sz="1300" dirty="0">
                 <a:solidFill>
@@ -4663,9 +4624,6 @@
               </a:rPr>
               <a:t>一</a:t>
             </a:r>
-            <a:pPr algn="l" indent="0" marL="0">
-              <a:buNone/>
-            </a:pPr>
             <a:r>
               <a:rPr lang="en-US" sz="1300" dirty="0">
                 <a:solidFill>
@@ -4823,9 +4781,6 @@
               </a:rPr>
               <a:t>一</a:t>
             </a:r>
-            <a:pPr algn="l" indent="0" marL="0">
-              <a:buNone/>
-            </a:pPr>
             <a:r>
               <a:rPr lang="en-US" sz="1300" dirty="0">
                 <a:solidFill>
@@ -4983,9 +4938,6 @@
               </a:rPr>
               <a:t>一</a:t>
             </a:r>
-            <a:pPr algn="l" indent="0" marL="0">
-              <a:buNone/>
-            </a:pPr>
             <a:r>
               <a:rPr lang="en-US" sz="1300" dirty="0">
                 <a:solidFill>
@@ -5143,9 +5095,6 @@
               </a:rPr>
               <a:t>一</a:t>
             </a:r>
-            <a:pPr algn="l" indent="0" marL="0">
-              <a:buNone/>
-            </a:pPr>
             <a:r>
               <a:rPr lang="en-US" sz="1300" dirty="0">
                 <a:solidFill>
@@ -5303,9 +5252,6 @@
               </a:rPr>
               <a:t>一</a:t>
             </a:r>
-            <a:pPr algn="l" indent="0" marL="0">
-              <a:buNone/>
-            </a:pPr>
             <a:r>
               <a:rPr lang="en-US" sz="1300" dirty="0">
                 <a:solidFill>
@@ -5473,12 +5419,6 @@
               </a:rPr>
               <a:t>Write a short paragraph (</a:t>
             </a:r>
-            <a:pPr algn="l" indent="0" marL="0">
-              <a:lnSpc>
-                <a:spcPts val="1470"/>
-              </a:lnSpc>
-              <a:buNone/>
-            </a:pPr>
             <a:r>
               <a:rPr lang="en-US" sz="1050" b="1" dirty="0">
                 <a:solidFill>
@@ -5490,12 +5430,6 @@
               </a:rPr>
               <a:t>4–5 sentences</a:t>
             </a:r>
-            <a:pPr algn="l" indent="0" marL="0">
-              <a:lnSpc>
-                <a:spcPts val="1470"/>
-              </a:lnSpc>
-              <a:buNone/>
-            </a:pPr>
             <a:r>
               <a:rPr lang="en-US" sz="1050" dirty="0">
                 <a:solidFill>
@@ -5719,6 +5653,20 @@
               </a:rPr>
               <a:t>我们学校有</a:t>
             </a:r>
+            <a:r>
+              <a:rPr lang="en-US" sz="1050" dirty="0">
+                <a:solidFill>
+                  <a:srgbClr val="1A2535"/>
+                </a:solidFill>
+                <a:latin typeface="Noto Serif SC" pitchFamily="34" charset="0"/>
+                <a:ea typeface="Noto Serif SC" pitchFamily="34" charset="-122"/>
+                <a:cs typeface="Noto Serif SC" pitchFamily="34" charset="-120"/>
+              </a:rPr>
+              <a:t>幢教学楼。</a:t>
+            </a:r>
+            <a:endParaRPr lang="en-US" sz="1050" dirty="0"/>
+          </a:p>
+          <a:p>
             <a:pPr algn="l" indent="0" marL="0">
               <a:lnSpc>
                 <a:spcPts val="1575"/>
@@ -5734,7 +5682,7 @@
                 <a:ea typeface="Noto Serif SC" pitchFamily="34" charset="-122"/>
                 <a:cs typeface="Noto Serif SC" pitchFamily="34" charset="-120"/>
               </a:rPr>
-              <a:t>幢教学楼。</a:t>
+              <a:t>教室在</a:t>
             </a:r>
             <a:endParaRPr lang="en-US" sz="1050" dirty="0"/>
           </a:p>
@@ -5754,7 +5702,7 @@
                 <a:ea typeface="Noto Serif SC" pitchFamily="34" charset="-122"/>
                 <a:cs typeface="Noto Serif SC" pitchFamily="34" charset="-120"/>
               </a:rPr>
-              <a:t>教室在</a:t>
+              <a:t>层。</a:t>
             </a:r>
             <a:endParaRPr lang="en-US" sz="1050" dirty="0"/>
           </a:p>
@@ -5774,7 +5722,7 @@
                 <a:ea typeface="Noto Serif SC" pitchFamily="34" charset="-122"/>
                 <a:cs typeface="Noto Serif SC" pitchFamily="34" charset="-120"/>
               </a:rPr>
-              <a:t>层。</a:t>
+              <a:t>图书馆在</a:t>
             </a:r>
             <a:endParaRPr lang="en-US" sz="1050" dirty="0"/>
           </a:p>
@@ -5794,34 +5742,8 @@
                 <a:ea typeface="Noto Serif SC" pitchFamily="34" charset="-122"/>
                 <a:cs typeface="Noto Serif SC" pitchFamily="34" charset="-120"/>
               </a:rPr>
-              <a:t>图书馆在</a:t>
-            </a:r>
-            <a:endParaRPr lang="en-US" sz="1050" dirty="0"/>
-          </a:p>
-          <a:p>
-            <a:pPr algn="l" indent="0" marL="0">
-              <a:lnSpc>
-                <a:spcPts val="1575"/>
-              </a:lnSpc>
-              <a:buNone/>
-            </a:pPr>
-            <a:r>
-              <a:rPr lang="en-US" sz="1050" dirty="0">
-                <a:solidFill>
-                  <a:srgbClr val="1A2535"/>
-                </a:solidFill>
-                <a:latin typeface="Noto Serif SC" pitchFamily="34" charset="0"/>
-                <a:ea typeface="Noto Serif SC" pitchFamily="34" charset="-122"/>
-                <a:cs typeface="Noto Serif SC" pitchFamily="34" charset="-120"/>
-              </a:rPr>
               <a:t>的</a:t>
             </a:r>
-            <a:pPr algn="l" indent="0" marL="0">
-              <a:lnSpc>
-                <a:spcPts val="1575"/>
-              </a:lnSpc>
-              <a:buNone/>
-            </a:pPr>
             <a:r>
               <a:rPr lang="en-US" sz="1050" dirty="0">
                 <a:solidFill>
@@ -5911,12 +5833,6 @@
               </a:rPr>
               <a:t>Extension:</a:t>
             </a:r>
-            <a:pPr algn="l" indent="0" marL="0">
-              <a:lnSpc>
-                <a:spcPts val="1190"/>
-              </a:lnSpc>
-              <a:buNone/>
-            </a:pPr>
             <a:r>
               <a:rPr lang="en-US" sz="850" dirty="0">
                 <a:solidFill>
@@ -6459,9 +6375,6 @@
               </a:rPr>
               <a:t>一</a:t>
             </a:r>
-            <a:pPr algn="ctr" indent="0" marL="0">
-              <a:buNone/>
-            </a:pPr>
             <a:r>
               <a:rPr lang="en-US" sz="1700" b="1" dirty="0">
                 <a:solidFill>
@@ -6473,9 +6386,6 @@
               </a:rPr>
               <a:t>匹</a:t>
             </a:r>
-            <a:pPr algn="ctr" indent="0" marL="0">
-              <a:buNone/>
-            </a:pPr>
             <a:r>
               <a:rPr lang="en-US" sz="1700" dirty="0">
                 <a:solidFill>
@@ -6640,9 +6550,6 @@
               </a:rPr>
               <a:t>一</a:t>
             </a:r>
-            <a:pPr algn="ctr" indent="0" marL="0">
-              <a:buNone/>
-            </a:pPr>
             <a:r>
               <a:rPr lang="en-US" sz="1700" b="1" dirty="0">
                 <a:solidFill>
@@ -6654,9 +6561,6 @@
               </a:rPr>
               <a:t>头</a:t>
             </a:r>
-            <a:pPr algn="ctr" indent="0" marL="0">
-              <a:buNone/>
-            </a:pPr>
             <a:r>
               <a:rPr lang="en-US" sz="1700" dirty="0">
                 <a:solidFill>
@@ -6821,9 +6725,6 @@
               </a:rPr>
               <a:t>一</a:t>
             </a:r>
-            <a:pPr algn="ctr" indent="0" marL="0">
-              <a:buNone/>
-            </a:pPr>
             <a:r>
               <a:rPr lang="en-US" sz="1700" b="1" dirty="0">
                 <a:solidFill>
@@ -6835,9 +6736,6 @@
               </a:rPr>
               <a:t>张</a:t>
             </a:r>
-            <a:pPr algn="ctr" indent="0" marL="0">
-              <a:buNone/>
-            </a:pPr>
             <a:r>
               <a:rPr lang="en-US" sz="1700" dirty="0">
                 <a:solidFill>
@@ -7002,9 +6900,6 @@
               </a:rPr>
               <a:t>一</a:t>
             </a:r>
-            <a:pPr algn="ctr" indent="0" marL="0">
-              <a:buNone/>
-            </a:pPr>
             <a:r>
               <a:rPr lang="en-US" sz="1700" b="1" dirty="0">
                 <a:solidFill>
@@ -7016,9 +6911,6 @@
               </a:rPr>
               <a:t>朵</a:t>
             </a:r>
-            <a:pPr algn="ctr" indent="0" marL="0">
-              <a:buNone/>
-            </a:pPr>
             <a:r>
               <a:rPr lang="en-US" sz="1700" dirty="0">
                 <a:solidFill>
@@ -7183,9 +7075,6 @@
               </a:rPr>
               <a:t>一</a:t>
             </a:r>
-            <a:pPr algn="ctr" indent="0" marL="0">
-              <a:buNone/>
-            </a:pPr>
             <a:r>
               <a:rPr lang="en-US" sz="1700" b="1" dirty="0">
                 <a:solidFill>
@@ -7197,9 +7086,6 @@
               </a:rPr>
               <a:t>副</a:t>
             </a:r>
-            <a:pPr algn="ctr" indent="0" marL="0">
-              <a:buNone/>
-            </a:pPr>
             <a:r>
               <a:rPr lang="en-US" sz="1700" dirty="0">
                 <a:solidFill>
@@ -7364,9 +7250,6 @@
               </a:rPr>
               <a:t>一</a:t>
             </a:r>
-            <a:pPr algn="ctr" indent="0" marL="0">
-              <a:buNone/>
-            </a:pPr>
             <a:r>
               <a:rPr lang="en-US" sz="1700" b="1" dirty="0">
                 <a:solidFill>
@@ -7378,9 +7261,6 @@
               </a:rPr>
               <a:t>架</a:t>
             </a:r>
-            <a:pPr algn="ctr" indent="0" marL="0">
-              <a:buNone/>
-            </a:pPr>
             <a:r>
               <a:rPr lang="en-US" sz="1700" dirty="0">
                 <a:solidFill>
@@ -7545,9 +7425,6 @@
               </a:rPr>
               <a:t>一</a:t>
             </a:r>
-            <a:pPr algn="ctr" indent="0" marL="0">
-              <a:buNone/>
-            </a:pPr>
             <a:r>
               <a:rPr lang="en-US" sz="1700" b="1" dirty="0">
                 <a:solidFill>
@@ -7559,9 +7436,6 @@
               </a:rPr>
               <a:t>节</a:t>
             </a:r>
-            <a:pPr algn="ctr" indent="0" marL="0">
-              <a:buNone/>
-            </a:pPr>
             <a:r>
               <a:rPr lang="en-US" sz="1700" dirty="0">
                 <a:solidFill>
@@ -7726,9 +7600,6 @@
               </a:rPr>
               <a:t>一</a:t>
             </a:r>
-            <a:pPr algn="ctr" indent="0" marL="0">
-              <a:buNone/>
-            </a:pPr>
             <a:r>
               <a:rPr lang="en-US" sz="1700" b="1" dirty="0">
                 <a:solidFill>
@@ -7740,9 +7611,6 @@
               </a:rPr>
               <a:t>节</a:t>
             </a:r>
-            <a:pPr algn="ctr" indent="0" marL="0">
-              <a:buNone/>
-            </a:pPr>
             <a:r>
               <a:rPr lang="en-US" sz="1700" dirty="0">
                 <a:solidFill>
@@ -7907,9 +7775,6 @@
               </a:rPr>
               <a:t>一</a:t>
             </a:r>
-            <a:pPr algn="ctr" indent="0" marL="0">
-              <a:buNone/>
-            </a:pPr>
             <a:r>
               <a:rPr lang="en-US" sz="1700" b="1" dirty="0">
                 <a:solidFill>
@@ -7921,9 +7786,6 @@
               </a:rPr>
               <a:t>双</a:t>
             </a:r>
-            <a:pPr algn="ctr" indent="0" marL="0">
-              <a:buNone/>
-            </a:pPr>
             <a:r>
               <a:rPr lang="en-US" sz="1700" dirty="0">
                 <a:solidFill>
@@ -8088,9 +7950,6 @@
               </a:rPr>
               <a:t>一</a:t>
             </a:r>
-            <a:pPr algn="ctr" indent="0" marL="0">
-              <a:buNone/>
-            </a:pPr>
             <a:r>
               <a:rPr lang="en-US" sz="1700" b="1" dirty="0">
                 <a:solidFill>
@@ -8102,9 +7961,6 @@
               </a:rPr>
               <a:t>套</a:t>
             </a:r>
-            <a:pPr algn="ctr" indent="0" marL="0">
-              <a:buNone/>
-            </a:pPr>
             <a:r>
               <a:rPr lang="en-US" sz="1700" dirty="0">
                 <a:solidFill>
@@ -8269,9 +8125,6 @@
               </a:rPr>
               <a:t>一</a:t>
             </a:r>
-            <a:pPr algn="ctr" indent="0" marL="0">
-              <a:buNone/>
-            </a:pPr>
             <a:r>
               <a:rPr lang="en-US" sz="1700" b="1" dirty="0">
                 <a:solidFill>
@@ -8283,9 +8136,6 @@
               </a:rPr>
               <a:t>位</a:t>
             </a:r>
-            <a:pPr algn="ctr" indent="0" marL="0">
-              <a:buNone/>
-            </a:pPr>
             <a:r>
               <a:rPr lang="en-US" sz="1700" dirty="0">
                 <a:solidFill>
@@ -8450,9 +8300,6 @@
               </a:rPr>
               <a:t>一</a:t>
             </a:r>
-            <a:pPr algn="ctr" indent="0" marL="0">
-              <a:buNone/>
-            </a:pPr>
             <a:r>
               <a:rPr lang="en-US" sz="1700" b="1" dirty="0">
                 <a:solidFill>
@@ -8464,9 +8311,6 @@
               </a:rPr>
               <a:t>件</a:t>
             </a:r>
-            <a:pPr algn="ctr" indent="0" marL="0">
-              <a:buNone/>
-            </a:pPr>
             <a:r>
               <a:rPr lang="en-US" sz="1700" dirty="0">
                 <a:solidFill>
@@ -8592,9 +8436,6 @@
               </a:rPr>
               <a:t>Self-mark Part 1 now.</a:t>
             </a:r>
-            <a:pPr algn="l" indent="0" marL="0">
-              <a:buNone/>
-            </a:pPr>
             <a:r>
               <a:rPr lang="en-US" sz="1100" dirty="0">
                 <a:solidFill>
@@ -11228,12 +11069,6 @@
               </a:rPr>
               <a:t>Teams confer </a:t>
             </a:r>
-            <a:pPr algn="l" indent="0" marL="0">
-              <a:spcAft>
-                <a:spcPts val="1600"/>
-              </a:spcAft>
-              <a:buNone/>
-            </a:pPr>
             <a:r>
               <a:rPr lang="en-US" sz="1250" b="1" dirty="0">
                 <a:solidFill>
@@ -11245,12 +11080,6 @@
               </a:rPr>
               <a:t>5 seconds</a:t>
             </a:r>
-            <a:pPr algn="l" indent="0" marL="0">
-              <a:spcAft>
-                <a:spcPts val="1600"/>
-              </a:spcAft>
-              <a:buNone/>
-            </a:pPr>
             <a:r>
               <a:rPr lang="en-US" sz="1250" dirty="0">
                 <a:solidFill>
@@ -11262,12 +11091,6 @@
               </a:rPr>
               <a:t>, then hold up books. </a:t>
             </a:r>
-            <a:pPr algn="l" indent="0" marL="0">
-              <a:spcAft>
-                <a:spcPts val="1600"/>
-              </a:spcAft>
-              <a:buNone/>
-            </a:pPr>
             <a:r>
               <a:rPr lang="en-US" sz="1250" b="1" dirty="0">
                 <a:solidFill>
@@ -12008,9 +11831,6 @@
               </a:rPr>
               <a:t>Scaffold:</a:t>
             </a:r>
-            <a:pPr algn="l" indent="0" marL="0">
-              <a:buNone/>
-            </a:pPr>
             <a:r>
               <a:rPr lang="en-US" sz="1050" dirty="0">
                 <a:solidFill>
@@ -12022,9 +11842,6 @@
               </a:rPr>
               <a:t> teams get 5 seconds to confer · </a:t>
             </a:r>
-            <a:pPr algn="l" indent="0" marL="0">
-              <a:buNone/>
-            </a:pPr>
             <a:r>
               <a:rPr lang="en-US" sz="1050" b="1" dirty="0">
                 <a:solidFill>
@@ -12036,9 +11853,6 @@
               </a:rPr>
               <a:t>Extension:</a:t>
             </a:r>
-            <a:pPr algn="l" indent="0" marL="0">
-              <a:buNone/>
-            </a:pPr>
             <a:r>
               <a:rPr lang="en-US" sz="1050" dirty="0">
                 <a:solidFill>
@@ -12691,9 +12505,6 @@
               </a:rPr>
               <a:t>位置词 "旁边"</a:t>
             </a:r>
-            <a:pPr algn="l" indent="0" marL="0">
-              <a:buNone/>
-            </a:pPr>
             <a:r>
               <a:rPr lang="en-US" sz="950" dirty="0">
                 <a:solidFill>
@@ -12968,9 +12779,6 @@
               </a:rPr>
               <a:t>位置词 "中间"</a:t>
             </a:r>
-            <a:pPr algn="l" indent="0" marL="0">
-              <a:buNone/>
-            </a:pPr>
             <a:r>
               <a:rPr lang="en-US" sz="950" dirty="0">
                 <a:solidFill>
@@ -13057,9 +12865,6 @@
               </a:rPr>
               <a:t>Bonus point</a:t>
             </a:r>
-            <a:pPr algn="l" indent="0" marL="0">
-              <a:buNone/>
-            </a:pPr>
             <a:r>
               <a:rPr lang="en-US" sz="1050" dirty="0">
                 <a:solidFill>
@@ -13680,9 +13485,6 @@
               </a:rPr>
               <a:t>一</a:t>
             </a:r>
-            <a:pPr algn="ctr" indent="0" marL="0">
-              <a:buNone/>
-            </a:pPr>
             <a:r>
               <a:rPr lang="en-US" sz="3000" dirty="0">
                 <a:solidFill>
@@ -13808,9 +13610,6 @@
               </a:rPr>
               <a:t>一</a:t>
             </a:r>
-            <a:pPr algn="ctr" indent="0" marL="0">
-              <a:buNone/>
-            </a:pPr>
             <a:r>
               <a:rPr lang="en-US" sz="3000" dirty="0">
                 <a:solidFill>
@@ -13936,9 +13735,6 @@
               </a:rPr>
               <a:t>一</a:t>
             </a:r>
-            <a:pPr algn="ctr" indent="0" marL="0">
-              <a:buNone/>
-            </a:pPr>
             <a:r>
               <a:rPr lang="en-US" sz="3000" dirty="0">
                 <a:solidFill>
@@ -14862,9 +14658,6 @@
               </a:rPr>
               <a:t>一</a:t>
             </a:r>
-            <a:pPr algn="ctr" indent="0" marL="0">
-              <a:buNone/>
-            </a:pPr>
             <a:r>
               <a:rPr lang="en-US" sz="2600" b="1" dirty="0">
                 <a:solidFill>
@@ -14876,9 +14669,6 @@
               </a:rPr>
               <a:t>顶</a:t>
             </a:r>
-            <a:pPr algn="ctr" indent="0" marL="0">
-              <a:buNone/>
-            </a:pPr>
             <a:r>
               <a:rPr lang="en-US" sz="2600" dirty="0">
                 <a:solidFill>
@@ -15004,9 +14794,6 @@
               </a:rPr>
               <a:t>一</a:t>
             </a:r>
-            <a:pPr algn="ctr" indent="0" marL="0">
-              <a:buNone/>
-            </a:pPr>
             <a:r>
               <a:rPr lang="en-US" sz="2600" b="1" dirty="0">
                 <a:solidFill>
@@ -15018,9 +14805,6 @@
               </a:rPr>
               <a:t>支</a:t>
             </a:r>
-            <a:pPr algn="ctr" indent="0" marL="0">
-              <a:buNone/>
-            </a:pPr>
             <a:r>
               <a:rPr lang="en-US" sz="2600" dirty="0">
                 <a:solidFill>
@@ -15146,9 +14930,6 @@
               </a:rPr>
               <a:t>一</a:t>
             </a:r>
-            <a:pPr algn="ctr" indent="0" marL="0">
-              <a:buNone/>
-            </a:pPr>
             <a:r>
               <a:rPr lang="en-US" sz="2600" b="1" dirty="0">
                 <a:solidFill>
@@ -15160,9 +14941,6 @@
               </a:rPr>
               <a:t>幢</a:t>
             </a:r>
-            <a:pPr algn="ctr" indent="0" marL="0">
-              <a:buNone/>
-            </a:pPr>
             <a:r>
               <a:rPr lang="en-US" sz="2600" dirty="0">
                 <a:solidFill>
@@ -16385,12 +16163,6 @@
               </a:rPr>
               <a:t>自我总结：我最需要复习</a:t>
             </a:r>
-            <a:pPr algn="l" indent="0" marL="0">
-              <a:lnSpc>
-                <a:spcPts val="1820"/>
-              </a:lnSpc>
-              <a:buNone/>
-            </a:pPr>
             <a:r>
               <a:rPr lang="en-US" sz="1300" dirty="0">
                 <a:solidFill>
@@ -16402,12 +16174,6 @@
               </a:rPr>
               <a:t>，因为</a:t>
             </a:r>
-            <a:pPr algn="l" indent="0" marL="0">
-              <a:lnSpc>
-                <a:spcPts val="1820"/>
-              </a:lnSpc>
-              <a:buNone/>
-            </a:pPr>
             <a:r>
               <a:rPr lang="en-US" sz="1300" dirty="0">
                 <a:solidFill>
@@ -18209,12 +17975,6 @@
               </a:rPr>
               <a:t>→</a:t>
             </a:r>
-            <a:pPr algn="l" indent="0" marL="0">
-              <a:spcBef>
-                <a:spcPts val="100"/>
-              </a:spcBef>
-              <a:buNone/>
-            </a:pPr>
             <a:r>
               <a:rPr lang="en-US" sz="1050" dirty="0">
                 <a:solidFill>
@@ -18414,12 +18174,6 @@
               </a:rPr>
               <a:t>→</a:t>
             </a:r>
-            <a:pPr algn="l" indent="0" marL="0">
-              <a:spcBef>
-                <a:spcPts val="100"/>
-              </a:spcBef>
-              <a:buNone/>
-            </a:pPr>
             <a:r>
               <a:rPr lang="en-US" sz="1050" dirty="0">
                 <a:solidFill>
@@ -18619,12 +18373,6 @@
               </a:rPr>
               <a:t>→</a:t>
             </a:r>
-            <a:pPr algn="l" indent="0" marL="0">
-              <a:spcBef>
-                <a:spcPts val="100"/>
-              </a:spcBef>
-              <a:buNone/>
-            </a:pPr>
             <a:r>
               <a:rPr lang="en-US" sz="1050" dirty="0">
                 <a:solidFill>
@@ -18824,12 +18572,6 @@
               </a:rPr>
               <a:t>→</a:t>
             </a:r>
-            <a:pPr algn="l" indent="0" marL="0">
-              <a:spcBef>
-                <a:spcPts val="100"/>
-              </a:spcBef>
-              <a:buNone/>
-            </a:pPr>
             <a:r>
               <a:rPr lang="en-US" sz="1050" dirty="0">
                 <a:solidFill>
@@ -19029,12 +18771,6 @@
               </a:rPr>
               <a:t>→</a:t>
             </a:r>
-            <a:pPr algn="l" indent="0" marL="0">
-              <a:spcBef>
-                <a:spcPts val="100"/>
-              </a:spcBef>
-              <a:buNone/>
-            </a:pPr>
             <a:r>
               <a:rPr lang="en-US" sz="1050" dirty="0">
                 <a:solidFill>
@@ -19234,12 +18970,6 @@
               </a:rPr>
               <a:t>→</a:t>
             </a:r>
-            <a:pPr algn="l" indent="0" marL="0">
-              <a:spcBef>
-                <a:spcPts val="100"/>
-              </a:spcBef>
-              <a:buNone/>
-            </a:pPr>
             <a:r>
               <a:rPr lang="en-US" sz="1050" dirty="0">
                 <a:solidFill>
@@ -19481,12 +19211,6 @@
               </a:rPr>
               <a:t>→</a:t>
             </a:r>
-            <a:pPr algn="l" indent="0" marL="0">
-              <a:spcBef>
-                <a:spcPts val="100"/>
-              </a:spcBef>
-              <a:buNone/>
-            </a:pPr>
             <a:r>
               <a:rPr lang="en-US" sz="1050" dirty="0">
                 <a:solidFill>
@@ -19874,12 +19598,6 @@
               </a:rPr>
               <a:t>→</a:t>
             </a:r>
-            <a:pPr algn="l" indent="0" marL="0">
-              <a:spcBef>
-                <a:spcPts val="100"/>
-              </a:spcBef>
-              <a:buNone/>
-            </a:pPr>
             <a:r>
               <a:rPr lang="en-US" sz="1050" dirty="0">
                 <a:solidFill>
@@ -20193,9 +19911,6 @@
               </a:rPr>
               <a:t>Cold call + choral echo on every item</a:t>
             </a:r>
-            <a:pPr algn="l" indent="0" marL="0">
-              <a:buNone/>
-            </a:pPr>
             <a:r>
               <a:rPr lang="en-US" sz="1000" dirty="0">
                 <a:solidFill>
@@ -20776,15 +20491,6 @@
               </a:rPr>
               <a:t>We are </a:t>
             </a:r>
-            <a:pPr algn="l" indent="0" marL="0">
-              <a:lnSpc>
-                <a:spcPts val="1958"/>
-              </a:lnSpc>
-              <a:spcAft>
-                <a:spcPts val="500"/>
-              </a:spcAft>
-              <a:buNone/>
-            </a:pPr>
             <a:r>
               <a:rPr lang="en-US" sz="1350" b="1" dirty="0">
                 <a:solidFill>
@@ -20796,15 +20502,6 @@
               </a:rPr>
               <a:t>consolidating all Lesson 8 vocabulary and sentence patterns</a:t>
             </a:r>
-            <a:pPr algn="l" indent="0" marL="0">
-              <a:lnSpc>
-                <a:spcPts val="1958"/>
-              </a:lnSpc>
-              <a:spcAft>
-                <a:spcPts val="500"/>
-              </a:spcAft>
-              <a:buNone/>
-            </a:pPr>
             <a:r>
               <a:rPr lang="en-US" sz="1350" dirty="0">
                 <a:solidFill>
@@ -21063,9 +20760,6 @@
               </a:rPr>
               <a:t>我能翻译 Lesson 8 所有测验词汇（</a:t>
             </a:r>
-            <a:pPr algn="l" indent="0" marL="0">
-              <a:buNone/>
-            </a:pPr>
             <a:r>
               <a:rPr lang="en-US" sz="1350" b="1" dirty="0">
                 <a:solidFill>
@@ -21077,9 +20771,6 @@
               </a:rPr>
               <a:t>中文 ↔ 英文</a:t>
             </a:r>
-            <a:pPr algn="l" indent="0" marL="0">
-              <a:buNone/>
-            </a:pPr>
             <a:r>
               <a:rPr lang="en-US" sz="1350" dirty="0">
                 <a:solidFill>
@@ -21296,9 +20987,6 @@
               </a:rPr>
               <a:t>我能正确写出 </a:t>
             </a:r>
-            <a:pPr algn="l" indent="0" marL="0">
-              <a:buNone/>
-            </a:pPr>
             <a:r>
               <a:rPr lang="en-US" sz="1350" b="1" dirty="0">
                 <a:solidFill>
@@ -21310,9 +20998,6 @@
               </a:rPr>
               <a:t>18 个名词</a:t>
             </a:r>
-            <a:pPr algn="l" indent="0" marL="0">
-              <a:buNone/>
-            </a:pPr>
             <a:r>
               <a:rPr lang="en-US" sz="1350" dirty="0">
                 <a:solidFill>
@@ -21529,9 +21214,6 @@
               </a:rPr>
               <a:t>我能用 </a:t>
             </a:r>
-            <a:pPr algn="l" indent="0" marL="0">
-              <a:buNone/>
-            </a:pPr>
             <a:r>
               <a:rPr lang="en-US" sz="1350" b="1" dirty="0">
                 <a:solidFill>
@@ -21543,9 +21225,6 @@
               </a:rPr>
               <a:t>"X 在 Y 的……"</a:t>
             </a:r>
-            <a:pPr algn="l" indent="0" marL="0">
-              <a:buNone/>
-            </a:pPr>
             <a:r>
               <a:rPr lang="en-US" sz="1350" dirty="0">
                 <a:solidFill>
@@ -23605,9 +23284,6 @@
               </a:rPr>
               <a:t>校长室</a:t>
             </a:r>
-            <a:pPr algn="l" indent="0" marL="0">
-              <a:buNone/>
-            </a:pPr>
             <a:r>
               <a:rPr lang="en-US" sz="950" b="1" dirty="0">
                 <a:solidFill>
@@ -24007,9 +23683,6 @@
               </a:rPr>
               <a:t>游泳馆</a:t>
             </a:r>
-            <a:pPr algn="l" indent="0" marL="0">
-              <a:buNone/>
-            </a:pPr>
             <a:r>
               <a:rPr lang="en-US" sz="950" b="1" dirty="0">
                 <a:solidFill>
@@ -24409,9 +24082,6 @@
               </a:rPr>
               <a:t>体育场</a:t>
             </a:r>
-            <a:pPr algn="l" indent="0" marL="0">
-              <a:buNone/>
-            </a:pPr>
             <a:r>
               <a:rPr lang="en-US" sz="950" b="1" dirty="0">
                 <a:solidFill>
@@ -24632,9 +24302,6 @@
               </a:rPr>
               <a:t>运动场</a:t>
             </a:r>
-            <a:pPr algn="l" indent="0" marL="0">
-              <a:buNone/>
-            </a:pPr>
             <a:r>
               <a:rPr lang="en-US" sz="950" b="1" dirty="0">
                 <a:solidFill>
@@ -28669,12 +28336,6 @@
               </a:rPr>
               <a:t>个 / 幢</a:t>
             </a:r>
-            <a:pPr algn="l" indent="0" marL="0">
-              <a:spcAft>
-                <a:spcPts val="600"/>
-              </a:spcAft>
-              <a:buNone/>
-            </a:pPr>
             <a:r>
               <a:rPr lang="en-US" sz="1400" dirty="0">
                 <a:solidFill>
@@ -28748,9 +28409,6 @@
               </a:rPr>
               <a:t>一</a:t>
             </a:r>
-            <a:pPr algn="l" indent="0" marL="0">
-              <a:buNone/>
-            </a:pPr>
             <a:r>
               <a:rPr lang="en-US" sz="1250" b="1" dirty="0">
                 <a:solidFill>
@@ -28762,9 +28420,6 @@
               </a:rPr>
               <a:t>个</a:t>
             </a:r>
-            <a:pPr algn="l" indent="0" marL="0">
-              <a:buNone/>
-            </a:pPr>
             <a:r>
               <a:rPr lang="en-US" sz="1250" dirty="0">
                 <a:solidFill>
@@ -28776,9 +28431,6 @@
               </a:rPr>
               <a:t>图书馆。五</a:t>
             </a:r>
-            <a:pPr algn="l" indent="0" marL="0">
-              <a:buNone/>
-            </a:pPr>
             <a:r>
               <a:rPr lang="en-US" sz="1250" b="1" dirty="0">
                 <a:solidFill>
@@ -28790,9 +28442,6 @@
               </a:rPr>
               <a:t>幢</a:t>
             </a:r>
-            <a:pPr algn="l" indent="0" marL="0">
-              <a:buNone/>
-            </a:pPr>
             <a:r>
               <a:rPr lang="en-US" sz="1250" dirty="0">
                 <a:solidFill>
@@ -29041,12 +28690,6 @@
               </a:rPr>
               <a:t>层</a:t>
             </a:r>
-            <a:pPr algn="l" indent="0" marL="0">
-              <a:spcAft>
-                <a:spcPts val="600"/>
-              </a:spcAft>
-              <a:buNone/>
-            </a:pPr>
             <a:r>
               <a:rPr lang="en-US" sz="1400" dirty="0">
                 <a:solidFill>
@@ -29058,12 +28701,6 @@
               </a:rPr>
               <a:t> = </a:t>
             </a:r>
-            <a:pPr algn="l" indent="0" marL="0">
-              <a:spcAft>
-                <a:spcPts val="600"/>
-              </a:spcAft>
-              <a:buNone/>
-            </a:pPr>
             <a:r>
               <a:rPr lang="en-US" sz="1400" b="1" dirty="0">
                 <a:solidFill>
@@ -29075,12 +28712,6 @@
               </a:rPr>
               <a:t>楼</a:t>
             </a:r>
-            <a:pPr algn="l" indent="0" marL="0">
-              <a:spcAft>
-                <a:spcPts val="600"/>
-              </a:spcAft>
-              <a:buNone/>
-            </a:pPr>
             <a:r>
               <a:rPr lang="en-US" sz="1400" dirty="0">
                 <a:solidFill>
@@ -29154,9 +28785,6 @@
               </a:rPr>
               <a:t>三</a:t>
             </a:r>
-            <a:pPr algn="l" indent="0" marL="0">
-              <a:buNone/>
-            </a:pPr>
             <a:r>
               <a:rPr lang="en-US" sz="1250" b="1" dirty="0">
                 <a:solidFill>
@@ -29168,9 +28796,6 @@
               </a:rPr>
               <a:t>层</a:t>
             </a:r>
-            <a:pPr algn="l" indent="0" marL="0">
-              <a:buNone/>
-            </a:pPr>
             <a:r>
               <a:rPr lang="en-US" sz="1250" dirty="0">
                 <a:solidFill>
@@ -29182,9 +28807,6 @@
               </a:rPr>
               <a:t> = 三</a:t>
             </a:r>
-            <a:pPr algn="l" indent="0" marL="0">
-              <a:buNone/>
-            </a:pPr>
             <a:r>
               <a:rPr lang="en-US" sz="1250" b="1" dirty="0">
                 <a:solidFill>
@@ -29196,9 +28818,6 @@
               </a:rPr>
               <a:t>楼</a:t>
             </a:r>
-            <a:pPr algn="l" indent="0" marL="0">
-              <a:buNone/>
-            </a:pPr>
             <a:r>
               <a:rPr lang="en-US" sz="1250" dirty="0">
                 <a:solidFill>
@@ -29447,12 +29066,6 @@
               </a:rPr>
               <a:t>X </a:t>
             </a:r>
-            <a:pPr algn="l" indent="0" marL="0">
-              <a:spcAft>
-                <a:spcPts val="600"/>
-              </a:spcAft>
-              <a:buNone/>
-            </a:pPr>
             <a:r>
               <a:rPr lang="en-US" sz="1400" b="1" dirty="0">
                 <a:solidFill>
@@ -29464,12 +29077,6 @@
               </a:rPr>
               <a:t>在</a:t>
             </a:r>
-            <a:pPr algn="l" indent="0" marL="0">
-              <a:spcAft>
-                <a:spcPts val="600"/>
-              </a:spcAft>
-              <a:buNone/>
-            </a:pPr>
             <a:r>
               <a:rPr lang="en-US" sz="1400" dirty="0">
                 <a:solidFill>
@@ -29481,12 +29088,6 @@
               </a:rPr>
               <a:t> Y </a:t>
             </a:r>
-            <a:pPr algn="l" indent="0" marL="0">
-              <a:spcAft>
-                <a:spcPts val="600"/>
-              </a:spcAft>
-              <a:buNone/>
-            </a:pPr>
             <a:r>
               <a:rPr lang="en-US" sz="1400" b="1" dirty="0">
                 <a:solidFill>
@@ -29498,12 +29099,6 @@
               </a:rPr>
               <a:t>的</a:t>
             </a:r>
-            <a:pPr algn="l" indent="0" marL="0">
-              <a:spcAft>
-                <a:spcPts val="600"/>
-              </a:spcAft>
-              <a:buNone/>
-            </a:pPr>
             <a:r>
               <a:rPr lang="en-US" sz="1400" dirty="0">
                 <a:solidFill>
@@ -29577,9 +29172,6 @@
               </a:rPr>
               <a:t>图书馆</a:t>
             </a:r>
-            <a:pPr algn="l" indent="0" marL="0">
-              <a:buNone/>
-            </a:pPr>
             <a:r>
               <a:rPr lang="en-US" sz="1250" b="1" dirty="0">
                 <a:solidFill>
@@ -29591,9 +29183,6 @@
               </a:rPr>
               <a:t>在</a:t>
             </a:r>
-            <a:pPr algn="l" indent="0" marL="0">
-              <a:buNone/>
-            </a:pPr>
             <a:r>
               <a:rPr lang="en-US" sz="1250" dirty="0">
                 <a:solidFill>
@@ -29605,9 +29194,6 @@
               </a:rPr>
               <a:t>体育馆</a:t>
             </a:r>
-            <a:pPr algn="l" indent="0" marL="0">
-              <a:buNone/>
-            </a:pPr>
             <a:r>
               <a:rPr lang="en-US" sz="1250" b="1" dirty="0">
                 <a:solidFill>
@@ -29619,9 +29205,6 @@
               </a:rPr>
               <a:t>的</a:t>
             </a:r>
-            <a:pPr algn="l" indent="0" marL="0">
-              <a:buNone/>
-            </a:pPr>
             <a:r>
               <a:rPr lang="en-US" sz="1250" dirty="0">
                 <a:solidFill>
@@ -29870,12 +29453,6 @@
               </a:rPr>
               <a:t>楼上/楼下</a:t>
             </a:r>
-            <a:pPr algn="l" indent="0" marL="0">
-              <a:spcAft>
-                <a:spcPts val="600"/>
-              </a:spcAft>
-              <a:buNone/>
-            </a:pPr>
             <a:r>
               <a:rPr lang="en-US" sz="1400" dirty="0">
                 <a:solidFill>
@@ -29887,12 +29464,6 @@
               </a:rPr>
               <a:t> (location) vs </a:t>
             </a:r>
-            <a:pPr algn="l" indent="0" marL="0">
-              <a:spcAft>
-                <a:spcPts val="600"/>
-              </a:spcAft>
-              <a:buNone/>
-            </a:pPr>
             <a:r>
               <a:rPr lang="en-US" sz="1400" b="1" dirty="0">
                 <a:solidFill>
@@ -29904,12 +29475,6 @@
               </a:rPr>
               <a:t>上楼/下楼</a:t>
             </a:r>
-            <a:pPr algn="l" indent="0" marL="0">
-              <a:spcAft>
-                <a:spcPts val="600"/>
-              </a:spcAft>
-              <a:buNone/>
-            </a:pPr>
             <a:r>
               <a:rPr lang="en-US" sz="1400" dirty="0">
                 <a:solidFill>
@@ -30103,12 +29668,6 @@
               </a:rPr>
               <a:t>位置词绝不能放在"在"前面！</a:t>
             </a:r>
-            <a:pPr algn="l" indent="0" marL="0">
-              <a:lnSpc>
-                <a:spcPts val="1610"/>
-              </a:lnSpc>
-              <a:buNone/>
-            </a:pPr>
             <a:r>
               <a:rPr lang="en-US" sz="1150" dirty="0">
                 <a:solidFill>
@@ -31121,12 +30680,6 @@
               </a:rPr>
               <a:t>Give me </a:t>
             </a:r>
-            <a:pPr algn="l" indent="0" marL="0">
-              <a:lnSpc>
-                <a:spcPts val="1540"/>
-              </a:lnSpc>
-              <a:buNone/>
-            </a:pPr>
             <a:r>
               <a:rPr lang="en-US" sz="1100" b="1" dirty="0">
                 <a:solidFill>
@@ -31138,12 +30691,6 @@
               </a:rPr>
               <a:t>ONE</a:t>
             </a:r>
-            <a:pPr algn="l" indent="0" marL="0">
-              <a:lnSpc>
-                <a:spcPts val="1540"/>
-              </a:lnSpc>
-              <a:buNone/>
-            </a:pPr>
             <a:r>
               <a:rPr lang="en-US" sz="1100" dirty="0">
                 <a:solidFill>
@@ -31155,12 +30702,6 @@
               </a:rPr>
               <a:t> sentence using </a:t>
             </a:r>
-            <a:pPr algn="l" indent="0" marL="0">
-              <a:lnSpc>
-                <a:spcPts val="1540"/>
-              </a:lnSpc>
-              <a:buNone/>
-            </a:pPr>
             <a:r>
               <a:rPr lang="en-US" sz="1100" b="1" dirty="0">
                 <a:solidFill>
@@ -31382,12 +30923,6 @@
               </a:rPr>
               <a:t>Cold call </a:t>
             </a:r>
-            <a:pPr algn="l" indent="0" marL="0">
-              <a:lnSpc>
-                <a:spcPts val="1400"/>
-              </a:lnSpc>
-              <a:buNone/>
-            </a:pPr>
             <a:r>
               <a:rPr lang="en-US" sz="1000" b="1" dirty="0">
                 <a:solidFill>
@@ -31399,12 +30934,6 @@
               </a:rPr>
               <a:t>2 students.</a:t>
             </a:r>
-            <a:pPr algn="l" indent="0" marL="0">
-              <a:lnSpc>
-                <a:spcPts val="1400"/>
-              </a:lnSpc>
-              <a:buNone/>
-            </a:pPr>
             <a:r>
               <a:rPr lang="en-US" sz="1000" dirty="0">
                 <a:solidFill>
@@ -31416,12 +30945,6 @@
               </a:rPr>
               <a:t> Class echoes the better one </a:t>
             </a:r>
-            <a:pPr algn="l" indent="0" marL="0">
-              <a:lnSpc>
-                <a:spcPts val="1400"/>
-              </a:lnSpc>
-              <a:buNone/>
-            </a:pPr>
             <a:r>
               <a:rPr lang="en-US" sz="1000" b="1" dirty="0">
                 <a:solidFill>
@@ -31589,12 +31112,6 @@
               </a:rPr>
               <a:t>找出错误！</a:t>
             </a:r>
-            <a:pPr algn="l" indent="0" marL="0">
-              <a:lnSpc>
-                <a:spcPts val="1540"/>
-              </a:lnSpc>
-              <a:buNone/>
-            </a:pPr>
             <a:r>
               <a:rPr lang="en-US" sz="1100" dirty="0">
                 <a:solidFill>
@@ -31797,12 +31314,6 @@
               </a:rPr>
               <a:t>Cold call </a:t>
             </a:r>
-            <a:pPr algn="l" indent="0" marL="0">
-              <a:lnSpc>
-                <a:spcPts val="1400"/>
-              </a:lnSpc>
-              <a:buNone/>
-            </a:pPr>
             <a:r>
               <a:rPr lang="en-US" sz="1000" b="1" dirty="0">
                 <a:solidFill>
@@ -31814,12 +31325,6 @@
               </a:rPr>
               <a:t>1 student</a:t>
             </a:r>
-            <a:pPr algn="l" indent="0" marL="0">
-              <a:lnSpc>
-                <a:spcPts val="1400"/>
-              </a:lnSpc>
-              <a:buNone/>
-            </a:pPr>
             <a:r>
               <a:rPr lang="en-US" sz="1000" dirty="0">
                 <a:solidFill>
@@ -32776,12 +32281,6 @@
               </a:rPr>
               <a:t>Sample answer — </a:t>
             </a:r>
-            <a:pPr algn="l" indent="0" marL="0">
-              <a:lnSpc>
-                <a:spcPts val="1330"/>
-              </a:lnSpc>
-              <a:buNone/>
-            </a:pPr>
             <a:r>
               <a:rPr lang="en-US" sz="950" b="1" dirty="0">
                 <a:solidFill>
@@ -32793,12 +32292,6 @@
               </a:rPr>
               <a:t>accept any valid X在Y的旁边 sentence</a:t>
             </a:r>
-            <a:pPr algn="l" indent="0" marL="0">
-              <a:lnSpc>
-                <a:spcPts val="1330"/>
-              </a:lnSpc>
-              <a:buNone/>
-            </a:pPr>
             <a:r>
               <a:rPr lang="en-US" sz="950" dirty="0">
                 <a:solidFill>
@@ -33959,9 +33452,6 @@
               </a:rPr>
               <a:t>一</a:t>
             </a:r>
-            <a:pPr algn="l" indent="0" marL="0">
-              <a:buNone/>
-            </a:pPr>
             <a:r>
               <a:rPr lang="en-US" sz="1500" dirty="0">
                 <a:solidFill>
@@ -34119,9 +33609,6 @@
               </a:rPr>
               <a:t>一</a:t>
             </a:r>
-            <a:pPr algn="l" indent="0" marL="0">
-              <a:buNone/>
-            </a:pPr>
             <a:r>
               <a:rPr lang="en-US" sz="1500" dirty="0">
                 <a:solidFill>
@@ -34279,9 +33766,6 @@
               </a:rPr>
               <a:t>一</a:t>
             </a:r>
-            <a:pPr algn="l" indent="0" marL="0">
-              <a:buNone/>
-            </a:pPr>
             <a:r>
               <a:rPr lang="en-US" sz="1500" dirty="0">
                 <a:solidFill>
@@ -34439,9 +33923,6 @@
               </a:rPr>
               <a:t>一</a:t>
             </a:r>
-            <a:pPr algn="l" indent="0" marL="0">
-              <a:buNone/>
-            </a:pPr>
             <a:r>
               <a:rPr lang="en-US" sz="1500" dirty="0">
                 <a:solidFill>
@@ -35641,9 +35122,6 @@
               </a:rPr>
               <a:t>一</a:t>
             </a:r>
-            <a:pPr algn="ctr" indent="0" marL="0">
-              <a:buNone/>
-            </a:pPr>
             <a:r>
               <a:rPr lang="en-US" sz="2300" b="1" dirty="0">
                 <a:solidFill>
@@ -35655,9 +35133,6 @@
               </a:rPr>
               <a:t>条</a:t>
             </a:r>
-            <a:pPr algn="ctr" indent="0" marL="0">
-              <a:buNone/>
-            </a:pPr>
             <a:r>
               <a:rPr lang="en-US" sz="2300" dirty="0">
                 <a:solidFill>
@@ -35786,9 +35261,6 @@
               </a:rPr>
               <a:t>一</a:t>
             </a:r>
-            <a:pPr algn="ctr" indent="0" marL="0">
-              <a:buNone/>
-            </a:pPr>
             <a:r>
               <a:rPr lang="en-US" sz="2300" b="1" dirty="0">
                 <a:solidFill>
@@ -35800,9 +35272,6 @@
               </a:rPr>
               <a:t>辆</a:t>
             </a:r>
-            <a:pPr algn="ctr" indent="0" marL="0">
-              <a:buNone/>
-            </a:pPr>
             <a:r>
               <a:rPr lang="en-US" sz="2300" dirty="0">
                 <a:solidFill>
@@ -35931,9 +35400,6 @@
               </a:rPr>
               <a:t>一</a:t>
             </a:r>
-            <a:pPr algn="ctr" indent="0" marL="0">
-              <a:buNone/>
-            </a:pPr>
             <a:r>
               <a:rPr lang="en-US" sz="2300" b="1" dirty="0">
                 <a:solidFill>
@@ -35945,9 +35411,6 @@
               </a:rPr>
               <a:t>顶</a:t>
             </a:r>
-            <a:pPr algn="ctr" indent="0" marL="0">
-              <a:buNone/>
-            </a:pPr>
             <a:r>
               <a:rPr lang="en-US" sz="2300" dirty="0">
                 <a:solidFill>
@@ -36076,9 +35539,6 @@
               </a:rPr>
               <a:t>一</a:t>
             </a:r>
-            <a:pPr algn="ctr" indent="0" marL="0">
-              <a:buNone/>
-            </a:pPr>
             <a:r>
               <a:rPr lang="en-US" sz="2300" b="1" dirty="0">
                 <a:solidFill>
@@ -36090,9 +35550,6 @@
               </a:rPr>
               <a:t>幢</a:t>
             </a:r>
-            <a:pPr algn="ctr" indent="0" marL="0">
-              <a:buNone/>
-            </a:pPr>
             <a:r>
               <a:rPr lang="en-US" sz="2300" dirty="0">
                 <a:solidFill>
